--- a/system-design-101/vi/lessons/sd-06-008/slides/sd-06-008.pptx
+++ b/system-design-101/vi/lessons/sd-06-008/slides/sd-06-008.pptx
@@ -1701,7 +1701,7 @@
         <p:spPr>
           <a:xfrm>
             <a:off x="914400" y="1428750"/>
-            <a:ext cx="16459200" cy="2505075"/>
+            <a:ext cx="16459200" cy="3600450"/>
           </a:xfrm>
           <a:prstGeom prst="rect">
             <a:avLst/>
@@ -1710,17 +1710,17 @@
           <a:ln/>
         </p:spPr>
         <p:txBody>
-          <a:bodyPr wrap="square" lIns="0" tIns="64294" rIns="0" bIns="-64294" rtlCol="0" anchor="t"/>
+          <a:bodyPr wrap="square" lIns="0" tIns="69437" rIns="0" bIns="-69437" rtlCol="0" anchor="t"/>
           <a:lstStyle/>
           <a:p>
             <a:pPr algn="l" indent="0" marL="0">
               <a:lnSpc>
-                <a:spcPts val="7875"/>
+                <a:spcPts val="8505"/>
               </a:lnSpc>
               <a:buNone/>
             </a:pPr>
             <a:r>
-              <a:rPr lang="en-US" sz="7500" dirty="0" spc="1" kern="0">
+              <a:rPr lang="en-US" sz="8100" dirty="0" spc="-1" kern="0">
                 <a:solidFill>
                   <a:srgbClr val="F3EEE3"/>
                 </a:solidFill>
@@ -1731,7 +1731,7 @@
               <a:t>Năm</a:t>
             </a:r>
             <a:r>
-              <a:rPr lang="en-US" sz="7500" dirty="0" spc="5" kern="0">
+              <a:rPr lang="en-US" sz="8100" dirty="0" spc="2" kern="0">
                 <a:solidFill>
                   <a:srgbClr val="F3EEE3"/>
                 </a:solidFill>
@@ -1742,7 +1742,7 @@
               <a:t> chiến</a:t>
             </a:r>
             <a:r>
-              <a:rPr lang="en-US" sz="7500" dirty="0" spc="-106" kern="0">
+              <a:rPr lang="en-US" sz="8100" dirty="0" spc="-118" kern="0">
                 <a:solidFill>
                   <a:srgbClr val="F3EEE3"/>
                 </a:solidFill>
@@ -1753,7 +1753,7 @@
               <a:t> lược</a:t>
             </a:r>
             <a:r>
-              <a:rPr lang="en-US" sz="7500" dirty="0" spc="1" kern="0">
+              <a:rPr lang="en-US" sz="8100" dirty="0" spc="-3" kern="0">
                 <a:solidFill>
                   <a:srgbClr val="F3EEE3"/>
                 </a:solidFill>
@@ -1764,7 +1764,7 @@
               <a:t> giữ</a:t>
             </a:r>
             <a:r>
-              <a:rPr lang="en-US" sz="7500" dirty="0" spc="-2" kern="0">
+              <a:rPr lang="en-US" sz="8100" dirty="0" spc="1" kern="0">
                 <a:solidFill>
                   <a:srgbClr val="F3EEE3"/>
                 </a:solidFill>
@@ -1775,7 +1775,7 @@
               <a:t> bộ</a:t>
             </a:r>
             <a:r>
-              <a:rPr lang="en-US" sz="7500" dirty="0" spc="2" kern="0">
+              <a:rPr lang="en-US" sz="8100" dirty="0" spc="-1" kern="0">
                 <a:solidFill>
                   <a:srgbClr val="F3EEE3"/>
                 </a:solidFill>
@@ -1786,7 +1786,7 @@
               <a:t> nhớ</a:t>
             </a:r>
             <a:r>
-              <a:rPr lang="en-US" sz="7500" dirty="0" spc="18" kern="0">
+              <a:rPr lang="en-US" sz="8100" dirty="0" spc="20" kern="0">
                 <a:solidFill>
                   <a:srgbClr val="F3EEE3"/>
                 </a:solidFill>
@@ -1797,7 +1797,7 @@
               <a:t> đệm</a:t>
             </a:r>
             <a:r>
-              <a:rPr lang="en-US" sz="7500" dirty="0" spc="-36" kern="0">
+              <a:rPr lang="en-US" sz="8100" dirty="0" spc="-43" kern="0">
                 <a:solidFill>
                   <a:srgbClr val="F3EEE3"/>
                 </a:solidFill>
@@ -1808,7 +1808,7 @@
               <a:t> khớp</a:t>
             </a:r>
             <a:r>
-              <a:rPr lang="en-US" sz="7500" dirty="0" spc="-90" kern="0">
+              <a:rPr lang="en-US" sz="8100" dirty="0" spc="-101" kern="0">
                 <a:solidFill>
                   <a:srgbClr val="F3EEE3"/>
                 </a:solidFill>
@@ -1819,7 +1819,7 @@
               <a:t> với</a:t>
             </a:r>
             <a:r>
-              <a:rPr lang="en-US" sz="7500" dirty="0" spc="2" kern="0">
+              <a:rPr lang="en-US" sz="8100" dirty="0" spc="-1" kern="0">
                 <a:solidFill>
                   <a:srgbClr val="F3EEE3"/>
                 </a:solidFill>
@@ -1827,10 +1827,10 @@
                 <a:ea typeface="Bricolage Grotesque ExtraBold" pitchFamily="34" charset="-122"/>
                 <a:cs typeface="Bricolage Grotesque ExtraBold" pitchFamily="34" charset="-120"/>
               </a:rPr>
-              <a:t> cơ sở</a:t>
-            </a:r>
-            <a:r>
-              <a:rPr lang="en-US" sz="7500" dirty="0" spc="-4" kern="0">
+              <a:t> cơ</a:t>
+            </a:r>
+            <a:r>
+              <a:rPr lang="en-US" sz="8100" dirty="0" spc="-2" kern="0">
                 <a:solidFill>
                   <a:srgbClr val="F3EEE3"/>
                 </a:solidFill>
@@ -1838,10 +1838,10 @@
                 <a:ea typeface="Bricolage Grotesque ExtraBold" pitchFamily="34" charset="-122"/>
                 <a:cs typeface="Bricolage Grotesque ExtraBold" pitchFamily="34" charset="-120"/>
               </a:rPr>
-              <a:t> dữ</a:t>
-            </a:r>
-            <a:r>
-              <a:rPr lang="en-US" sz="7500" dirty="0" spc="7" kern="0">
+              <a:t> sở</a:t>
+            </a:r>
+            <a:r>
+              <a:rPr lang="en-US" sz="8100" dirty="0" spc="-1" kern="0">
                 <a:solidFill>
                   <a:srgbClr val="F3EEE3"/>
                 </a:solidFill>
@@ -1849,9 +1849,20 @@
                 <a:ea typeface="Bricolage Grotesque ExtraBold" pitchFamily="34" charset="-122"/>
                 <a:cs typeface="Bricolage Grotesque ExtraBold" pitchFamily="34" charset="-120"/>
               </a:rPr>
+              <a:t> dữ</a:t>
+            </a:r>
+            <a:r>
+              <a:rPr lang="en-US" sz="8100" dirty="0" spc="2" kern="0">
+                <a:solidFill>
+                  <a:srgbClr val="F3EEE3"/>
+                </a:solidFill>
+                <a:latin typeface="Bricolage Grotesque ExtraBold" pitchFamily="34" charset="0"/>
+                <a:ea typeface="Bricolage Grotesque ExtraBold" pitchFamily="34" charset="-122"/>
+                <a:cs typeface="Bricolage Grotesque ExtraBold" pitchFamily="34" charset="-120"/>
+              </a:rPr>
               <a:t> liệu</a:t>
             </a:r>
-            <a:endParaRPr lang="en-US" sz="7500" dirty="0"/>
+            <a:endParaRPr lang="en-US" sz="8100" dirty="0"/>
           </a:p>
         </p:txBody>
       </p:sp>
@@ -1863,7 +1874,7 @@
         </p:nvSpPr>
         <p:spPr>
           <a:xfrm>
-            <a:off x="914400" y="4095750"/>
+            <a:off x="914400" y="5048250"/>
             <a:ext cx="16459200" cy="571500"/>
           </a:xfrm>
           <a:prstGeom prst="rect">
@@ -2012,7 +2023,7 @@
         </p:nvSpPr>
         <p:spPr>
           <a:xfrm>
-            <a:off x="914400" y="5191125"/>
+            <a:off x="914400" y="6096000"/>
             <a:ext cx="6667500" cy="342900"/>
           </a:xfrm>
           <a:prstGeom prst="rect">
@@ -2073,7 +2084,7 @@
         </p:nvSpPr>
         <p:spPr>
           <a:xfrm>
-            <a:off x="7334250" y="5191125"/>
+            <a:off x="7334250" y="6096000"/>
             <a:ext cx="10039350" cy="342900"/>
           </a:xfrm>
           <a:prstGeom prst="rect">
@@ -2134,7 +2145,7 @@
         </p:nvSpPr>
         <p:spPr>
           <a:xfrm>
-            <a:off x="914400" y="5715000"/>
+            <a:off x="914400" y="6619875"/>
             <a:ext cx="2914650" cy="1905000"/>
           </a:xfrm>
           <a:prstGeom prst="roundRect">
@@ -2161,7 +2172,7 @@
         </p:nvSpPr>
         <p:spPr>
           <a:xfrm>
-            <a:off x="1143000" y="5715000"/>
+            <a:off x="1143000" y="6619875"/>
             <a:ext cx="2457450" cy="1905000"/>
           </a:xfrm>
           <a:prstGeom prst="rect">
@@ -2178,7 +2189,7 @@
               <a:buNone/>
             </a:pPr>
             <a:r>
-              <a:rPr lang="en-US" sz="2925" dirty="0" spc="-2" kern="0">
+              <a:rPr lang="en-US" sz="3000" dirty="0" spc="1" kern="0">
                 <a:solidFill>
                   <a:srgbClr val="F3EEE3"/>
                 </a:solidFill>
@@ -2188,7 +2199,7 @@
               </a:rPr>
               <a:t>Cache-aside</a:t>
             </a:r>
-            <a:endParaRPr lang="en-US" sz="2925" dirty="0"/>
+            <a:endParaRPr lang="en-US" sz="3000" dirty="0"/>
           </a:p>
         </p:txBody>
       </p:sp>
@@ -2200,7 +2211,7 @@
         </p:nvSpPr>
         <p:spPr>
           <a:xfrm>
-            <a:off x="4057650" y="5715000"/>
+            <a:off x="4057650" y="6619875"/>
             <a:ext cx="2914650" cy="1905000"/>
           </a:xfrm>
           <a:prstGeom prst="roundRect">
@@ -2227,7 +2238,7 @@
         </p:nvSpPr>
         <p:spPr>
           <a:xfrm>
-            <a:off x="4286250" y="5715000"/>
+            <a:off x="4286250" y="6619875"/>
             <a:ext cx="2457450" cy="1905000"/>
           </a:xfrm>
           <a:prstGeom prst="rect">
@@ -2244,7 +2255,7 @@
               <a:buNone/>
             </a:pPr>
             <a:r>
-              <a:rPr lang="en-US" sz="2683" dirty="0" spc="-13" kern="0">
+              <a:rPr lang="en-US" sz="3000" dirty="0" spc="-12" kern="0">
                 <a:solidFill>
                   <a:srgbClr val="F3EEE3"/>
                 </a:solidFill>
@@ -2254,7 +2265,7 @@
               </a:rPr>
               <a:t>Read-through</a:t>
             </a:r>
-            <a:endParaRPr lang="en-US" sz="2683" dirty="0"/>
+            <a:endParaRPr lang="en-US" sz="3000" dirty="0"/>
           </a:p>
         </p:txBody>
       </p:sp>
@@ -2266,7 +2277,7 @@
         </p:nvSpPr>
         <p:spPr>
           <a:xfrm>
-            <a:off x="7334250" y="5715000"/>
+            <a:off x="7334250" y="6619875"/>
             <a:ext cx="3143250" cy="1905000"/>
           </a:xfrm>
           <a:prstGeom prst="roundRect">
@@ -2293,7 +2304,7 @@
         </p:nvSpPr>
         <p:spPr>
           <a:xfrm>
-            <a:off x="7562850" y="5715000"/>
+            <a:off x="7562850" y="6619875"/>
             <a:ext cx="2686050" cy="1905000"/>
           </a:xfrm>
           <a:prstGeom prst="rect">
@@ -2310,7 +2321,7 @@
               <a:buNone/>
             </a:pPr>
             <a:r>
-              <a:rPr lang="en-US" sz="2708" dirty="0" spc="-15" kern="0">
+              <a:rPr lang="en-US" sz="3000" dirty="0" spc="-15" kern="0">
                 <a:solidFill>
                   <a:srgbClr val="7C93FF"/>
                 </a:solidFill>
@@ -2320,7 +2331,7 @@
               </a:rPr>
               <a:t>Write-through</a:t>
             </a:r>
-            <a:endParaRPr lang="en-US" sz="2708" dirty="0"/>
+            <a:endParaRPr lang="en-US" sz="3000" dirty="0"/>
           </a:p>
         </p:txBody>
       </p:sp>
@@ -2332,7 +2343,7 @@
         </p:nvSpPr>
         <p:spPr>
           <a:xfrm>
-            <a:off x="10706100" y="5715000"/>
+            <a:off x="10706100" y="6619875"/>
             <a:ext cx="3143250" cy="1905000"/>
           </a:xfrm>
           <a:prstGeom prst="roundRect">
@@ -2359,7 +2370,7 @@
         </p:nvSpPr>
         <p:spPr>
           <a:xfrm>
-            <a:off x="10934700" y="5715000"/>
+            <a:off x="10934700" y="6619875"/>
             <a:ext cx="2686050" cy="1905000"/>
           </a:xfrm>
           <a:prstGeom prst="rect">
@@ -2376,7 +2387,7 @@
               <a:buNone/>
             </a:pPr>
             <a:r>
-              <a:rPr lang="en-US" sz="2933" dirty="0" spc="-11" kern="0">
+              <a:rPr lang="en-US" sz="3000" dirty="0" spc="-11" kern="0">
                 <a:solidFill>
                   <a:srgbClr val="FFB454"/>
                 </a:solidFill>
@@ -2386,7 +2397,7 @@
               </a:rPr>
               <a:t>Write-around</a:t>
             </a:r>
-            <a:endParaRPr lang="en-US" sz="2933" dirty="0"/>
+            <a:endParaRPr lang="en-US" sz="3000" dirty="0"/>
           </a:p>
         </p:txBody>
       </p:sp>
@@ -2398,7 +2409,7 @@
         </p:nvSpPr>
         <p:spPr>
           <a:xfrm>
-            <a:off x="14077950" y="5715000"/>
+            <a:off x="14077950" y="6619875"/>
             <a:ext cx="3143250" cy="1905000"/>
           </a:xfrm>
           <a:prstGeom prst="roundRect">
@@ -2425,7 +2436,7 @@
         </p:nvSpPr>
         <p:spPr>
           <a:xfrm>
-            <a:off x="14306550" y="5715000"/>
+            <a:off x="14306550" y="6619875"/>
             <a:ext cx="2686050" cy="1905000"/>
           </a:xfrm>
           <a:prstGeom prst="rect">
